--- a/docs/AiAssistant/AiAssistant-team-intro.ja.pptx
+++ b/docs/AiAssistant/AiAssistant-team-intro.ja.pptx
@@ -1392,7 +1392,7 @@
           <a:p>
             <a:r>
               <a:rPr lang="en-US" dirty="0"/>
-              <a:t>ドキュメント構成の複雑さはすべてここに集約 — 人間は覚えなくてよい。AGENTS.mdはツール中立のオープン標準；現在Cursor→Claude Codeへ移行中で今後も変わり得るため、ルールはツールより長生きさせる。規約はリポジトリ内にあるので、共有会に出たかどうかに関係なく全員に自動適用される。</a:t>
+              <a:t>読み込みの連鎖：ツールのポインタ（CLAUDE.md / .cursor/rules）→ プロジェクト自身のAGENTS.md → アダプタAGENTS-SystemDesign.md（常時有効の3行動のみ：docs領域へのトリガー、決定の記録提案、agreed-customer安全弁）→ 領域ルールdocs/SystemDesign/AGENTS.md（必要時に読込）。我々のセットは最後の2ファイルで、プロジェクトの既存AGENTS.mdにはリンク1行を追加するだけ — 内容は混ぜず、更新は上書きコピーのみ。規約はリポジトリ内にあるので、共有会に出たかどうかに関係なく全員に自動適用される。</a:t>
             </a:r>
             <a:endParaRPr lang="en-US" dirty="0"/>
           </a:p>
@@ -9003,7 +9003,7 @@
                 <a:ea typeface="Yu Gothic" pitchFamily="34" charset="-122"/>
                 <a:cs typeface="Yu Gothic" pitchFamily="34" charset="-120"/>
               </a:rPr>
-              <a:t>AGENTS.MD</a:t>
+              <a:t>INSTRUCTION FILE</a:t>
             </a:r>
             <a:endParaRPr lang="en-US" sz="1200" dirty="0"/>
           </a:p>
@@ -9056,119 +9056,12 @@
         </p:nvSpPr>
         <p:spPr>
           <a:xfrm>
-            <a:off x="1051560" y="1920240"/>
-            <a:ext cx="3108960" cy="1143000"/>
+            <a:off x="548640" y="1737360"/>
+            <a:ext cx="2194560" cy="502920"/>
           </a:xfrm>
           <a:prstGeom prst="roundRect">
             <a:avLst>
-              <a:gd name="adj" fmla="val 6400"/>
-            </a:avLst>
-          </a:prstGeom>
-          <a:solidFill>
-            <a:srgbClr val="1E2761"/>
-          </a:solidFill>
-          <a:ln/>
-          <a:effectLst>
-            <a:outerShdw sx="100000" sy="100000" kx="0" ky="0" algn="bl" rotWithShape="0" blurRad="88900" dist="25400" dir="5400000">
-              <a:srgbClr val="1E2761">
-                <a:alpha val="22000"/>
-              </a:srgbClr>
-            </a:outerShdw>
-          </a:effectLst>
-        </p:spPr>
-      </p:sp>
-      <p:sp>
-        <p:nvSpPr>
-          <p:cNvPr id="5" name="Text 3"/>
-          <p:cNvSpPr/>
-          <p:nvPr/>
-        </p:nvSpPr>
-        <p:spPr>
-          <a:xfrm>
-            <a:off x="1051560" y="2084832"/>
-            <a:ext cx="3108960" cy="457200"/>
-          </a:xfrm>
-          <a:prstGeom prst="rect">
-            <a:avLst/>
-          </a:prstGeom>
-          <a:noFill/>
-          <a:ln/>
-        </p:spPr>
-        <p:txBody>
-          <a:bodyPr wrap="square" lIns="0" tIns="0" rIns="0" bIns="0" rtlCol="0" anchor="ctr"/>
-          <a:lstStyle/>
-          <a:p>
-            <a:pPr algn="ctr" indent="0" marL="0">
-              <a:buNone/>
-            </a:pPr>
-            <a:r>
-              <a:rPr lang="en-US" sz="1700" b="1" dirty="0">
-                <a:solidFill>
-                  <a:srgbClr val="FFFFFF"/>
-                </a:solidFill>
-                <a:latin typeface="Courier New" pitchFamily="34" charset="0"/>
-                <a:ea typeface="Courier New" pitchFamily="34" charset="-122"/>
-                <a:cs typeface="Courier New" pitchFamily="34" charset="-120"/>
-              </a:rPr>
-              <a:t>AGENTS.md</a:t>
-            </a:r>
-            <a:endParaRPr lang="en-US" sz="1700" dirty="0"/>
-          </a:p>
-        </p:txBody>
-      </p:sp>
-      <p:sp>
-        <p:nvSpPr>
-          <p:cNvPr id="6" name="Text 4"/>
-          <p:cNvSpPr/>
-          <p:nvPr/>
-        </p:nvSpPr>
-        <p:spPr>
-          <a:xfrm>
-            <a:off x="1051560" y="2542032"/>
-            <a:ext cx="3108960" cy="365760"/>
-          </a:xfrm>
-          <a:prstGeom prst="rect">
-            <a:avLst/>
-          </a:prstGeom>
-          <a:noFill/>
-          <a:ln/>
-        </p:spPr>
-        <p:txBody>
-          <a:bodyPr wrap="square" lIns="0" tIns="0" rIns="0" bIns="0" rtlCol="0" anchor="ctr"/>
-          <a:lstStyle/>
-          <a:p>
-            <a:pPr algn="ctr" indent="0" marL="0">
-              <a:buNone/>
-            </a:pPr>
-            <a:r>
-              <a:rPr lang="en-US" sz="1150" dirty="0">
-                <a:solidFill>
-                  <a:srgbClr val="CADCFC"/>
-                </a:solidFill>
-                <a:latin typeface="Yu Gothic" pitchFamily="34" charset="0"/>
-                <a:ea typeface="Yu Gothic" pitchFamily="34" charset="-122"/>
-                <a:cs typeface="Yu Gothic" pitchFamily="34" charset="-120"/>
-              </a:rPr>
-              <a:t>唯一のマスター</a:t>
-            </a:r>
-            <a:endParaRPr lang="en-US" sz="1150" dirty="0"/>
-          </a:p>
-        </p:txBody>
-      </p:sp>
-      <p:sp>
-        <p:nvSpPr>
-          <p:cNvPr id="7" name="Shape 5"/>
-          <p:cNvSpPr/>
-          <p:nvPr/>
-        </p:nvSpPr>
-        <p:spPr>
-          <a:xfrm>
-            <a:off x="548640" y="3977640"/>
-            <a:ext cx="2011680" cy="685800"/>
-          </a:xfrm>
-          <a:prstGeom prst="roundRect">
-            <a:avLst>
-              <a:gd name="adj" fmla="val 9333"/>
+              <a:gd name="adj" fmla="val 12727"/>
             </a:avLst>
           </a:prstGeom>
           <a:solidFill>
@@ -9184,14 +9077,14 @@
       </p:sp>
       <p:sp>
         <p:nvSpPr>
-          <p:cNvPr id="8" name="Text 6"/>
-          <p:cNvSpPr/>
-          <p:nvPr/>
-        </p:nvSpPr>
-        <p:spPr>
-          <a:xfrm>
-            <a:off x="548640" y="3977640"/>
-            <a:ext cx="2011680" cy="685800"/>
+          <p:cNvPr id="5" name="Text 3"/>
+          <p:cNvSpPr/>
+          <p:nvPr/>
+        </p:nvSpPr>
+        <p:spPr>
+          <a:xfrm>
+            <a:off x="548640" y="1737360"/>
+            <a:ext cx="2194560" cy="502920"/>
           </a:xfrm>
           <a:prstGeom prst="rect">
             <a:avLst/>
@@ -9207,7 +9100,7 @@
               <a:buNone/>
             </a:pPr>
             <a:r>
-              <a:rPr lang="en-US" sz="1250" dirty="0">
+              <a:rPr lang="en-US" sz="1150" dirty="0">
                 <a:solidFill>
                   <a:srgbClr val="1E2761"/>
                 </a:solidFill>
@@ -9215,50 +9108,26 @@
                 <a:ea typeface="Courier New" pitchFamily="34" charset="-122"/>
                 <a:cs typeface="Courier New" pitchFamily="34" charset="-120"/>
               </a:rPr>
-              <a:t>CLAUDE.md  →</a:t>
-            </a:r>
-            <a:endParaRPr lang="en-US" sz="1250" dirty="0"/>
-          </a:p>
-        </p:txBody>
-      </p:sp>
-      <p:sp>
-        <p:nvSpPr>
-          <p:cNvPr id="9" name="Shape 7"/>
-          <p:cNvSpPr/>
-          <p:nvPr/>
-        </p:nvSpPr>
-        <p:spPr>
-          <a:xfrm flipV="1">
-            <a:off x="1554480" y="3063240"/>
-            <a:ext cx="1051560" cy="914400"/>
-          </a:xfrm>
-          <a:prstGeom prst="line">
-            <a:avLst/>
-          </a:prstGeom>
-          <a:noFill/>
-          <a:ln w="19050">
-            <a:solidFill>
-              <a:srgbClr val="5A6178"/>
-            </a:solidFill>
-            <a:prstDash val="solid"/>
-            <a:tailEnd type="arrow"/>
-          </a:ln>
-        </p:spPr>
-      </p:sp>
-      <p:sp>
-        <p:nvSpPr>
-          <p:cNvPr id="10" name="Shape 8"/>
-          <p:cNvSpPr/>
-          <p:nvPr/>
-        </p:nvSpPr>
-        <p:spPr>
-          <a:xfrm>
-            <a:off x="2697480" y="3977640"/>
-            <a:ext cx="2011680" cy="685800"/>
+              <a:t>CLAUDE.md</a:t>
+            </a:r>
+            <a:endParaRPr lang="en-US" sz="1150" dirty="0"/>
+          </a:p>
+        </p:txBody>
+      </p:sp>
+      <p:sp>
+        <p:nvSpPr>
+          <p:cNvPr id="6" name="Shape 4"/>
+          <p:cNvSpPr/>
+          <p:nvPr/>
+        </p:nvSpPr>
+        <p:spPr>
+          <a:xfrm>
+            <a:off x="2834640" y="1737360"/>
+            <a:ext cx="2194560" cy="502920"/>
           </a:xfrm>
           <a:prstGeom prst="roundRect">
             <a:avLst>
-              <a:gd name="adj" fmla="val 9333"/>
+              <a:gd name="adj" fmla="val 12727"/>
             </a:avLst>
           </a:prstGeom>
           <a:solidFill>
@@ -9274,14 +9143,14 @@
       </p:sp>
       <p:sp>
         <p:nvSpPr>
-          <p:cNvPr id="11" name="Text 9"/>
-          <p:cNvSpPr/>
-          <p:nvPr/>
-        </p:nvSpPr>
-        <p:spPr>
-          <a:xfrm>
-            <a:off x="2697480" y="3977640"/>
-            <a:ext cx="2011680" cy="685800"/>
+          <p:cNvPr id="7" name="Text 5"/>
+          <p:cNvSpPr/>
+          <p:nvPr/>
+        </p:nvSpPr>
+        <p:spPr>
+          <a:xfrm>
+            <a:off x="2834640" y="1737360"/>
+            <a:ext cx="2194560" cy="502920"/>
           </a:xfrm>
           <a:prstGeom prst="rect">
             <a:avLst/>
@@ -9297,7 +9166,7 @@
               <a:buNone/>
             </a:pPr>
             <a:r>
-              <a:rPr lang="en-US" sz="1250" dirty="0">
+              <a:rPr lang="en-US" sz="1150" dirty="0">
                 <a:solidFill>
                   <a:srgbClr val="1E2761"/>
                 </a:solidFill>
@@ -9305,22 +9174,22 @@
                 <a:ea typeface="Courier New" pitchFamily="34" charset="-122"/>
                 <a:cs typeface="Courier New" pitchFamily="34" charset="-120"/>
               </a:rPr>
-              <a:t>.cursor/rules  →</a:t>
-            </a:r>
-            <a:endParaRPr lang="en-US" sz="1250" dirty="0"/>
-          </a:p>
-        </p:txBody>
-      </p:sp>
-      <p:sp>
-        <p:nvSpPr>
-          <p:cNvPr id="12" name="Shape 10"/>
-          <p:cNvSpPr/>
-          <p:nvPr/>
-        </p:nvSpPr>
-        <p:spPr>
-          <a:xfrm flipV="1">
-            <a:off x="3703320" y="3063240"/>
-            <a:ext cx="45720" cy="914400"/>
+              <a:t>.cursor/rules</a:t>
+            </a:r>
+            <a:endParaRPr lang="en-US" sz="1150" dirty="0"/>
+          </a:p>
+        </p:txBody>
+      </p:sp>
+      <p:sp>
+        <p:nvSpPr>
+          <p:cNvPr id="8" name="Shape 6"/>
+          <p:cNvSpPr/>
+          <p:nvPr/>
+        </p:nvSpPr>
+        <p:spPr>
+          <a:xfrm>
+            <a:off x="2788920" y="2240280"/>
+            <a:ext cx="0" cy="256032"/>
           </a:xfrm>
           <a:prstGeom prst="line">
             <a:avLst/>
@@ -9337,14 +9206,43 @@
       </p:sp>
       <p:sp>
         <p:nvSpPr>
-          <p:cNvPr id="13" name="Text 11"/>
-          <p:cNvSpPr/>
-          <p:nvPr/>
-        </p:nvSpPr>
-        <p:spPr>
-          <a:xfrm>
-            <a:off x="548640" y="4892040"/>
-            <a:ext cx="4297680" cy="1188720"/>
+          <p:cNvPr id="9" name="Shape 7"/>
+          <p:cNvSpPr/>
+          <p:nvPr/>
+        </p:nvSpPr>
+        <p:spPr>
+          <a:xfrm>
+            <a:off x="548640" y="2496312"/>
+            <a:ext cx="4480560" cy="841248"/>
+          </a:xfrm>
+          <a:prstGeom prst="roundRect">
+            <a:avLst>
+              <a:gd name="adj" fmla="val 8696"/>
+            </a:avLst>
+          </a:prstGeom>
+          <a:solidFill>
+            <a:srgbClr val="CADCFC"/>
+          </a:solidFill>
+          <a:ln/>
+          <a:effectLst>
+            <a:outerShdw sx="100000" sy="100000" kx="0" ky="0" algn="bl" rotWithShape="0" blurRad="88900" dist="25400" dir="5400000">
+              <a:srgbClr val="1E2761">
+                <a:alpha val="22000"/>
+              </a:srgbClr>
+            </a:outerShdw>
+          </a:effectLst>
+        </p:spPr>
+      </p:sp>
+      <p:sp>
+        <p:nvSpPr>
+          <p:cNvPr id="10" name="Text 8"/>
+          <p:cNvSpPr/>
+          <p:nvPr/>
+        </p:nvSpPr>
+        <p:spPr>
+          <a:xfrm>
+            <a:off x="548640" y="2606040"/>
+            <a:ext cx="4480560" cy="384048"/>
           </a:xfrm>
           <a:prstGeom prst="rect">
             <a:avLst/>
@@ -9356,14 +9254,354 @@
           <a:bodyPr wrap="square" lIns="0" tIns="0" rIns="0" bIns="0" rtlCol="0" anchor="ctr"/>
           <a:lstStyle/>
           <a:p>
+            <a:pPr algn="ctr" indent="0" marL="0">
+              <a:buNone/>
+            </a:pPr>
+            <a:r>
+              <a:rPr lang="en-US" sz="1300" b="1" dirty="0">
+                <a:solidFill>
+                  <a:srgbClr val="1E2761"/>
+                </a:solidFill>
+                <a:latin typeface="Courier New" pitchFamily="34" charset="0"/>
+                <a:ea typeface="Courier New" pitchFamily="34" charset="-122"/>
+                <a:cs typeface="Courier New" pitchFamily="34" charset="-120"/>
+              </a:rPr>
+              <a:t>AGENTS.md</a:t>
+            </a:r>
+            <a:endParaRPr lang="en-US" sz="1300" dirty="0"/>
+          </a:p>
+        </p:txBody>
+      </p:sp>
+      <p:sp>
+        <p:nvSpPr>
+          <p:cNvPr id="11" name="Text 9"/>
+          <p:cNvSpPr/>
+          <p:nvPr/>
+        </p:nvSpPr>
+        <p:spPr>
+          <a:xfrm>
+            <a:off x="548640" y="2980944"/>
+            <a:ext cx="4480560" cy="310896"/>
+          </a:xfrm>
+          <a:prstGeom prst="rect">
+            <a:avLst/>
+          </a:prstGeom>
+          <a:noFill/>
+          <a:ln/>
+        </p:spPr>
+        <p:txBody>
+          <a:bodyPr wrap="square" lIns="0" tIns="0" rIns="0" bIns="0" rtlCol="0" anchor="ctr"/>
+          <a:lstStyle/>
+          <a:p>
+            <a:pPr algn="ctr" indent="0" marL="0">
+              <a:buNone/>
+            </a:pPr>
+            <a:r>
+              <a:rPr lang="en-US" sz="1050" dirty="0">
+                <a:solidFill>
+                  <a:srgbClr val="1E2761"/>
+                </a:solidFill>
+                <a:latin typeface="Yu Gothic" pitchFamily="34" charset="0"/>
+                <a:ea typeface="Yu Gothic" pitchFamily="34" charset="-122"/>
+                <a:cs typeface="Yu Gothic" pitchFamily="34" charset="-120"/>
+              </a:rPr>
+              <a:t>プロジェクト自身のルート — 固有ルール + リンク1行</a:t>
+            </a:r>
+            <a:endParaRPr lang="en-US" sz="1050" dirty="0"/>
+          </a:p>
+        </p:txBody>
+      </p:sp>
+      <p:sp>
+        <p:nvSpPr>
+          <p:cNvPr id="12" name="Shape 10"/>
+          <p:cNvSpPr/>
+          <p:nvPr/>
+        </p:nvSpPr>
+        <p:spPr>
+          <a:xfrm>
+            <a:off x="2788920" y="3337560"/>
+            <a:ext cx="0" cy="237744"/>
+          </a:xfrm>
+          <a:prstGeom prst="line">
+            <a:avLst/>
+          </a:prstGeom>
+          <a:noFill/>
+          <a:ln w="19050">
+            <a:solidFill>
+              <a:srgbClr val="5A6178"/>
+            </a:solidFill>
+            <a:prstDash val="solid"/>
+            <a:tailEnd type="arrow"/>
+          </a:ln>
+        </p:spPr>
+      </p:sp>
+      <p:sp>
+        <p:nvSpPr>
+          <p:cNvPr id="13" name="Shape 11"/>
+          <p:cNvSpPr/>
+          <p:nvPr/>
+        </p:nvSpPr>
+        <p:spPr>
+          <a:xfrm>
+            <a:off x="548640" y="3575304"/>
+            <a:ext cx="4480560" cy="841248"/>
+          </a:xfrm>
+          <a:prstGeom prst="roundRect">
+            <a:avLst>
+              <a:gd name="adj" fmla="val 8696"/>
+            </a:avLst>
+          </a:prstGeom>
+          <a:solidFill>
+            <a:srgbClr val="02C39A"/>
+          </a:solidFill>
+          <a:ln/>
+          <a:effectLst>
+            <a:outerShdw sx="100000" sy="100000" kx="0" ky="0" algn="bl" rotWithShape="0" blurRad="88900" dist="25400" dir="5400000">
+              <a:srgbClr val="1E2761">
+                <a:alpha val="22000"/>
+              </a:srgbClr>
+            </a:outerShdw>
+          </a:effectLst>
+        </p:spPr>
+      </p:sp>
+      <p:sp>
+        <p:nvSpPr>
+          <p:cNvPr id="14" name="Text 12"/>
+          <p:cNvSpPr/>
+          <p:nvPr/>
+        </p:nvSpPr>
+        <p:spPr>
+          <a:xfrm>
+            <a:off x="548640" y="3685032"/>
+            <a:ext cx="4480560" cy="384048"/>
+          </a:xfrm>
+          <a:prstGeom prst="rect">
+            <a:avLst/>
+          </a:prstGeom>
+          <a:noFill/>
+          <a:ln/>
+        </p:spPr>
+        <p:txBody>
+          <a:bodyPr wrap="square" lIns="0" tIns="0" rIns="0" bIns="0" rtlCol="0" anchor="ctr"/>
+          <a:lstStyle/>
+          <a:p>
+            <a:pPr algn="ctr" indent="0" marL="0">
+              <a:buNone/>
+            </a:pPr>
+            <a:r>
+              <a:rPr lang="en-US" sz="1300" b="1" dirty="0">
+                <a:solidFill>
+                  <a:srgbClr val="1E2761"/>
+                </a:solidFill>
+                <a:latin typeface="Courier New" pitchFamily="34" charset="0"/>
+                <a:ea typeface="Courier New" pitchFamily="34" charset="-122"/>
+                <a:cs typeface="Courier New" pitchFamily="34" charset="-120"/>
+              </a:rPr>
+              <a:t>AGENTS-SystemDesign.md</a:t>
+            </a:r>
+            <a:endParaRPr lang="en-US" sz="1300" dirty="0"/>
+          </a:p>
+        </p:txBody>
+      </p:sp>
+      <p:sp>
+        <p:nvSpPr>
+          <p:cNvPr id="15" name="Text 13"/>
+          <p:cNvSpPr/>
+          <p:nvPr/>
+        </p:nvSpPr>
+        <p:spPr>
+          <a:xfrm>
+            <a:off x="548640" y="4059936"/>
+            <a:ext cx="4480560" cy="310896"/>
+          </a:xfrm>
+          <a:prstGeom prst="rect">
+            <a:avLst/>
+          </a:prstGeom>
+          <a:noFill/>
+          <a:ln/>
+        </p:spPr>
+        <p:txBody>
+          <a:bodyPr wrap="square" lIns="0" tIns="0" rIns="0" bIns="0" rtlCol="0" anchor="ctr"/>
+          <a:lstStyle/>
+          <a:p>
+            <a:pPr algn="ctr" indent="0" marL="0">
+              <a:buNone/>
+            </a:pPr>
+            <a:r>
+              <a:rPr lang="en-US" sz="1050" dirty="0">
+                <a:solidFill>
+                  <a:srgbClr val="1E2761"/>
+                </a:solidFill>
+                <a:latin typeface="Yu Gothic" pitchFamily="34" charset="0"/>
+                <a:ea typeface="Yu Gothic" pitchFamily="34" charset="-122"/>
+                <a:cs typeface="Yu Gothic" pitchFamily="34" charset="-120"/>
+              </a:rPr>
+              <a:t>アダプタ — 常時有効の3つの行動</a:t>
+            </a:r>
+            <a:endParaRPr lang="en-US" sz="1050" dirty="0"/>
+          </a:p>
+        </p:txBody>
+      </p:sp>
+      <p:sp>
+        <p:nvSpPr>
+          <p:cNvPr id="16" name="Shape 14"/>
+          <p:cNvSpPr/>
+          <p:nvPr/>
+        </p:nvSpPr>
+        <p:spPr>
+          <a:xfrm>
+            <a:off x="2788920" y="4416552"/>
+            <a:ext cx="0" cy="237744"/>
+          </a:xfrm>
+          <a:prstGeom prst="line">
+            <a:avLst/>
+          </a:prstGeom>
+          <a:noFill/>
+          <a:ln w="19050">
+            <a:solidFill>
+              <a:srgbClr val="5A6178"/>
+            </a:solidFill>
+            <a:prstDash val="solid"/>
+            <a:tailEnd type="arrow"/>
+          </a:ln>
+        </p:spPr>
+      </p:sp>
+      <p:sp>
+        <p:nvSpPr>
+          <p:cNvPr id="17" name="Shape 15"/>
+          <p:cNvSpPr/>
+          <p:nvPr/>
+        </p:nvSpPr>
+        <p:spPr>
+          <a:xfrm>
+            <a:off x="548640" y="4654296"/>
+            <a:ext cx="4480560" cy="841248"/>
+          </a:xfrm>
+          <a:prstGeom prst="roundRect">
+            <a:avLst>
+              <a:gd name="adj" fmla="val 8696"/>
+            </a:avLst>
+          </a:prstGeom>
+          <a:solidFill>
+            <a:srgbClr val="1E2761"/>
+          </a:solidFill>
+          <a:ln/>
+          <a:effectLst>
+            <a:outerShdw sx="100000" sy="100000" kx="0" ky="0" algn="bl" rotWithShape="0" blurRad="88900" dist="25400" dir="5400000">
+              <a:srgbClr val="1E2761">
+                <a:alpha val="22000"/>
+              </a:srgbClr>
+            </a:outerShdw>
+          </a:effectLst>
+        </p:spPr>
+      </p:sp>
+      <p:sp>
+        <p:nvSpPr>
+          <p:cNvPr id="18" name="Text 16"/>
+          <p:cNvSpPr/>
+          <p:nvPr/>
+        </p:nvSpPr>
+        <p:spPr>
+          <a:xfrm>
+            <a:off x="548640" y="4764024"/>
+            <a:ext cx="4480560" cy="384048"/>
+          </a:xfrm>
+          <a:prstGeom prst="rect">
+            <a:avLst/>
+          </a:prstGeom>
+          <a:noFill/>
+          <a:ln/>
+        </p:spPr>
+        <p:txBody>
+          <a:bodyPr wrap="square" lIns="0" tIns="0" rIns="0" bIns="0" rtlCol="0" anchor="ctr"/>
+          <a:lstStyle/>
+          <a:p>
+            <a:pPr algn="ctr" indent="0" marL="0">
+              <a:buNone/>
+            </a:pPr>
+            <a:r>
+              <a:rPr lang="en-US" sz="1300" b="1" dirty="0">
+                <a:solidFill>
+                  <a:srgbClr val="FFFFFF"/>
+                </a:solidFill>
+                <a:latin typeface="Courier New" pitchFamily="34" charset="0"/>
+                <a:ea typeface="Courier New" pitchFamily="34" charset="-122"/>
+                <a:cs typeface="Courier New" pitchFamily="34" charset="-120"/>
+              </a:rPr>
+              <a:t>docs/SystemDesign/AGENTS.md</a:t>
+            </a:r>
+            <a:endParaRPr lang="en-US" sz="1300" dirty="0"/>
+          </a:p>
+        </p:txBody>
+      </p:sp>
+      <p:sp>
+        <p:nvSpPr>
+          <p:cNvPr id="19" name="Text 17"/>
+          <p:cNvSpPr/>
+          <p:nvPr/>
+        </p:nvSpPr>
+        <p:spPr>
+          <a:xfrm>
+            <a:off x="548640" y="5138928"/>
+            <a:ext cx="4480560" cy="310896"/>
+          </a:xfrm>
+          <a:prstGeom prst="rect">
+            <a:avLst/>
+          </a:prstGeom>
+          <a:noFill/>
+          <a:ln/>
+        </p:spPr>
+        <p:txBody>
+          <a:bodyPr wrap="square" lIns="0" tIns="0" rIns="0" bIns="0" rtlCol="0" anchor="ctr"/>
+          <a:lstStyle/>
+          <a:p>
+            <a:pPr algn="ctr" indent="0" marL="0">
+              <a:buNone/>
+            </a:pPr>
+            <a:r>
+              <a:rPr lang="en-US" sz="1050" dirty="0">
+                <a:solidFill>
+                  <a:srgbClr val="CADCFC"/>
+                </a:solidFill>
+                <a:latin typeface="Yu Gothic" pitchFamily="34" charset="0"/>
+                <a:ea typeface="Yu Gothic" pitchFamily="34" charset="-122"/>
+                <a:cs typeface="Yu Gothic" pitchFamily="34" charset="-120"/>
+              </a:rPr>
+              <a:t>設計ドキュメント領域の全ルール — 必要時に読込</a:t>
+            </a:r>
+            <a:endParaRPr lang="en-US" sz="1050" dirty="0"/>
+          </a:p>
+        </p:txBody>
+      </p:sp>
+      <p:sp>
+        <p:nvSpPr>
+          <p:cNvPr id="20" name="Text 18"/>
+          <p:cNvSpPr/>
+          <p:nvPr/>
+        </p:nvSpPr>
+        <p:spPr>
+          <a:xfrm>
+            <a:off x="548640" y="5632704"/>
+            <a:ext cx="4480560" cy="777240"/>
+          </a:xfrm>
+          <a:prstGeom prst="rect">
+            <a:avLst/>
+          </a:prstGeom>
+          <a:noFill/>
+          <a:ln/>
+        </p:spPr>
+        <p:txBody>
+          <a:bodyPr wrap="square" lIns="0" tIns="0" rIns="0" bIns="0" rtlCol="0" anchor="ctr"/>
+          <a:lstStyle/>
+          <a:p>
             <a:pPr indent="0" marL="0">
               <a:lnSpc>
-                <a:spcPct val="115000"/>
+                <a:spcPct val="112000"/>
               </a:lnSpc>
               <a:buNone/>
             </a:pPr>
             <a:r>
-              <a:rPr lang="en-US" sz="1200" i="1" dirty="0">
+              <a:rPr lang="en-US" sz="1100" i="1" dirty="0">
                 <a:solidFill>
                   <a:srgbClr val="5A6178"/>
                 </a:solidFill>
@@ -9371,55 +9609,15 @@
                 <a:ea typeface="Yu Gothic" pitchFamily="34" charset="-122"/>
                 <a:cs typeface="Yu Gothic" pitchFamily="34" charset="-120"/>
               </a:rPr>
-              <a:t>各ツールのファイルはAGENTS.mdを指すだけ。</a:t>
-            </a:r>
-            <a:endParaRPr lang="en-US" sz="1200" dirty="0"/>
-          </a:p>
-          <a:p>
-            <a:pPr indent="0" marL="0">
-              <a:lnSpc>
-                <a:spcPct val="115000"/>
-              </a:lnSpc>
-              <a:buNone/>
-            </a:pPr>
-            <a:r>
-              <a:rPr lang="en-US" sz="1200" i="1" dirty="0">
-                <a:solidFill>
-                  <a:srgbClr val="5A6178"/>
-                </a:solidFill>
-                <a:latin typeface="Yu Gothic" pitchFamily="34" charset="0"/>
-                <a:ea typeface="Yu Gothic" pitchFamily="34" charset="-122"/>
-                <a:cs typeface="Yu Gothic" pitchFamily="34" charset="-120"/>
-              </a:rPr>
-              <a:t>ルールの内容はツール選択より長生きする</a:t>
-            </a:r>
-            <a:endParaRPr lang="en-US" sz="1200" dirty="0"/>
-          </a:p>
-          <a:p>
-            <a:pPr indent="0" marL="0">
-              <a:lnSpc>
-                <a:spcPct val="115000"/>
-              </a:lnSpc>
-              <a:buNone/>
-            </a:pPr>
-            <a:r>
-              <a:rPr lang="en-US" sz="1200" i="1" dirty="0">
-                <a:solidFill>
-                  <a:srgbClr val="5A6178"/>
-                </a:solidFill>
-                <a:latin typeface="Yu Gothic" pitchFamily="34" charset="0"/>
-                <a:ea typeface="Yu Gothic" pitchFamily="34" charset="-122"/>
-                <a:cs typeface="Yu Gothic" pitchFamily="34" charset="-120"/>
-              </a:rPr>
-              <a:t>(Cursor → Claude Code → …)</a:t>
-            </a:r>
-            <a:endParaRPr lang="en-US" sz="1200" dirty="0"/>
-          </a:p>
-        </p:txBody>
-      </p:sp>
-      <p:sp>
-        <p:nvSpPr>
-          <p:cNvPr id="14" name="Text 12"/>
+              <a:t>我々のルールセットは下の2ファイル — 更新は上書きコピーのみで、プロジェクト固有ルールには触れない。ルールの内容はツール選択より長生きする。</a:t>
+            </a:r>
+            <a:endParaRPr lang="en-US" sz="1100" dirty="0"/>
+          </a:p>
+        </p:txBody>
+      </p:sp>
+      <p:sp>
+        <p:nvSpPr>
+          <p:cNvPr id="21" name="Text 19"/>
           <p:cNvSpPr/>
           <p:nvPr/>
         </p:nvSpPr>
@@ -9458,7 +9656,7 @@
       </p:sp>
       <p:sp>
         <p:nvSpPr>
-          <p:cNvPr id="15" name="Text 13"/>
+          <p:cNvPr id="22" name="Text 20"/>
           <p:cNvSpPr/>
           <p:nvPr/>
         </p:nvSpPr>
@@ -9624,7 +9822,7 @@
       </p:sp>
       <p:sp>
         <p:nvSpPr>
-          <p:cNvPr id="16" name="Shape 14"/>
+          <p:cNvPr id="23" name="Shape 21"/>
           <p:cNvSpPr/>
           <p:nvPr/>
         </p:nvSpPr>
@@ -9653,7 +9851,7 @@
       </p:sp>
       <p:sp>
         <p:nvSpPr>
-          <p:cNvPr id="17" name="Text 15"/>
+          <p:cNvPr id="24" name="Text 22"/>
           <p:cNvSpPr/>
           <p:nvPr/>
         </p:nvSpPr>
